--- a/plugins/office-cli/skills/house-style/templates/reiser-warm/reiser-warm.pptx
+++ b/plugins/office-cli/skills/house-style/templates/reiser-warm/reiser-warm.pptx
@@ -5,10 +5,10 @@
     <p:sldMasterId id="2147483684" r:id="rId1"/>
   </p:sldMasterIdLst>
   <p:notesMasterIdLst>
-    <p:notesMasterId r:id="rId2"/>
+    <p:notesMasterId r:id="rId4"/>
   </p:notesMasterIdLst>
   <p:sldIdLst>
-    <p:sldId id="256" r:id="rId3"/>
+    <p:sldId id="256" r:id="rId2"/>
   </p:sldIdLst>
   <p:sldSz cx="18288000" cy="10287000"/>
   <p:notesSz cx="10287000" cy="18288000"/>
@@ -108,49 +108,12 @@
     <p:ext uri="{521415D9-36F7-43E2-AB2F-B90AF26B5E84}">
       <p14:sectionLst xmlns:p14="http://schemas.microsoft.com/office/powerpoint/2010/main">
         <p14:section name="Reiser Warmth" id="{3F9DFA72-D4BD-624D-9D4A-E3772D6E2EC2}">
-          <p14:sldIdLst>
-            <p14:sldId id="293"/>
-            <p14:sldId id="275"/>
-            <p14:sldId id="276"/>
-            <p14:sldId id="277"/>
-            <p14:sldId id="278"/>
-            <p14:sldId id="279"/>
-            <p14:sldId id="280"/>
-            <p14:sldId id="281"/>
-            <p14:sldId id="282"/>
-            <p14:sldId id="283"/>
-            <p14:sldId id="284"/>
-            <p14:sldId id="285"/>
-            <p14:sldId id="286"/>
-            <p14:sldId id="287"/>
-            <p14:sldId id="288"/>
-            <p14:sldId id="289"/>
-            <p14:sldId id="290"/>
-            <p14:sldId id="291"/>
-            <p14:sldId id="292"/>
-          </p14:sldIdLst>
+          <p14:sldIdLst/>
         </p14:section>
         <p14:section name="ANA Blue" id="{11D30A14-23DC-D743-8936-F2F733B6B52B}">
           <p14:sldIdLst>
             <p14:sldId id="256"/>
             <p14:sldId id="257"/>
-            <p14:sldId id="258"/>
-            <p14:sldId id="259"/>
-            <p14:sldId id="260"/>
-            <p14:sldId id="261"/>
-            <p14:sldId id="262"/>
-            <p14:sldId id="263"/>
-            <p14:sldId id="264"/>
-            <p14:sldId id="265"/>
-            <p14:sldId id="266"/>
-            <p14:sldId id="267"/>
-            <p14:sldId id="268"/>
-            <p14:sldId id="269"/>
-            <p14:sldId id="270"/>
-            <p14:sldId id="271"/>
-            <p14:sldId id="272"/>
-            <p14:sldId id="273"/>
-            <p14:sldId id="274"/>
           </p14:sldIdLst>
         </p14:section>
       </p14:sectionLst>

--- a/plugins/office-cli/skills/house-style/templates/reiser-warm/reiser-warm.pptx
+++ b/plugins/office-cli/skills/house-style/templates/reiser-warm/reiser-warm.pptx
@@ -105,19 +105,6 @@
     </a:lvl9pPr>
   </p:defaultTextStyle>
   <p:extLst>
-    <p:ext uri="{521415D9-36F7-43E2-AB2F-B90AF26B5E84}">
-      <p14:sectionLst xmlns:p14="http://schemas.microsoft.com/office/powerpoint/2010/main">
-        <p14:section name="Reiser Warmth" id="{3F9DFA72-D4BD-624D-9D4A-E3772D6E2EC2}">
-          <p14:sldIdLst/>
-        </p14:section>
-        <p14:section name="ANA Blue" id="{11D30A14-23DC-D743-8936-F2F733B6B52B}">
-          <p14:sldIdLst>
-            <p14:sldId id="256"/>
-            <p14:sldId id="257"/>
-          </p14:sldIdLst>
-        </p14:section>
-      </p14:sectionLst>
-    </p:ext>
     <p:ext uri="{EFAFB233-063F-42B5-8137-9DF3F51BA10A}">
       <p15:sldGuideLst xmlns:p15="http://schemas.microsoft.com/office/powerpoint/2012/main"/>
     </p:ext>

--- a/plugins/office-cli/skills/house-style/templates/reiser-warm/reiser-warm.pptx
+++ b/plugins/office-cli/skills/house-style/templates/reiser-warm/reiser-warm.pptx
@@ -541,7 +541,7 @@
             <a:r>
               <a:rPr lang="en-US" sz="2000" b="1" i="0" dirty="0">
                 <a:solidFill>
-                  <a:srgbClr val="9D5C47"/>
+                  <a:srgbClr val="915542"/>
                 </a:solidFill>
                 <a:latin typeface="Arial"/>
                 <a:ea typeface="微軟正黑體"/>
@@ -840,7 +840,7 @@
             <a:r>
               <a:rPr lang="en-US" sz="2000" b="1" i="0" dirty="0">
                 <a:solidFill>
-                  <a:srgbClr val="9D5C47"/>
+                  <a:srgbClr val="915542"/>
                 </a:solidFill>
                 <a:latin typeface="Arial"/>
                 <a:ea typeface="微軟正黑體"/>
@@ -1181,7 +1181,7 @@
             <a:r>
               <a:rPr lang="en-US" sz="2000" b="1" i="0" dirty="0">
                 <a:solidFill>
-                  <a:srgbClr val="9D5C47"/>
+                  <a:srgbClr val="915542"/>
                 </a:solidFill>
                 <a:latin typeface="Arial"/>
                 <a:ea typeface="微軟正黑體"/>
@@ -1523,7 +1523,7 @@
             <a:r>
               <a:rPr lang="en-US" sz="2000" b="1" i="0" dirty="0">
                 <a:solidFill>
-                  <a:srgbClr val="9D5C47"/>
+                  <a:srgbClr val="915542"/>
                 </a:solidFill>
                 <a:latin typeface="Arial"/>
                 <a:ea typeface="微軟正黑體"/>
@@ -1772,7 +1772,7 @@
             <a:avLst/>
           </a:prstGeom>
           <a:solidFill>
-            <a:srgbClr val="F5F3F1"/>
+            <a:srgbClr val="FBF9F6"/>
           </a:solidFill>
           <a:ln w="12700">
             <a:solidFill>
@@ -2110,7 +2110,7 @@
             <a:r>
               <a:rPr lang="en-US" sz="2000" b="1" i="0" dirty="0">
                 <a:solidFill>
-                  <a:srgbClr val="9D5C47"/>
+                  <a:srgbClr val="915542"/>
                 </a:solidFill>
                 <a:latin typeface="Arial"/>
                 <a:ea typeface="微軟正黑體"/>
@@ -2357,7 +2357,7 @@
             <a:r>
               <a:rPr lang="en-US" sz="1800" b="1" i="0" dirty="0">
                 <a:solidFill>
-                  <a:srgbClr val="9D5C47"/>
+                  <a:srgbClr val="915542"/>
                 </a:solidFill>
                 <a:latin typeface="Arial"/>
                 <a:ea typeface="微軟正黑體"/>
@@ -2495,7 +2495,7 @@
             <a:r>
               <a:rPr lang="en-US" sz="1800" b="1" i="0" dirty="0">
                 <a:solidFill>
-                  <a:srgbClr val="9D5C47"/>
+                  <a:srgbClr val="915542"/>
                 </a:solidFill>
                 <a:latin typeface="Arial"/>
                 <a:ea typeface="微軟正黑體"/>
@@ -2633,7 +2633,7 @@
             <a:r>
               <a:rPr lang="en-US" sz="1800" b="1" i="0" dirty="0">
                 <a:solidFill>
-                  <a:srgbClr val="9D5C47"/>
+                  <a:srgbClr val="915542"/>
                 </a:solidFill>
                 <a:latin typeface="Arial"/>
                 <a:ea typeface="微軟正黑體"/>
@@ -2771,7 +2771,7 @@
             <a:r>
               <a:rPr lang="en-US" sz="1800" b="1" i="0" dirty="0">
                 <a:solidFill>
-                  <a:srgbClr val="9D5C47"/>
+                  <a:srgbClr val="915542"/>
                 </a:solidFill>
                 <a:latin typeface="Arial"/>
                 <a:ea typeface="微軟正黑體"/>
@@ -2882,7 +2882,7 @@
             <a:r>
               <a:rPr lang="en-US" sz="2000" b="1" i="0" dirty="0">
                 <a:solidFill>
-                  <a:srgbClr val="9D5C47"/>
+                  <a:srgbClr val="915542"/>
                 </a:solidFill>
                 <a:latin typeface="Arial"/>
                 <a:ea typeface="微軟正黑體"/>
@@ -3694,7 +3694,7 @@
             <a:r>
               <a:rPr lang="en-US" sz="2000" b="1" i="0" dirty="0">
                 <a:solidFill>
-                  <a:srgbClr val="9D5C47"/>
+                  <a:srgbClr val="915542"/>
                 </a:solidFill>
                 <a:latin typeface="Arial"/>
                 <a:ea typeface="微軟正黑體"/>
@@ -4420,7 +4420,7 @@
             <a:r>
               <a:rPr lang="en-US" sz="13000" b="1" i="0" dirty="0">
                 <a:solidFill>
-                  <a:srgbClr val="9D5C47"/>
+                  <a:srgbClr val="915542"/>
                 </a:solidFill>
                 <a:latin typeface="Arial"/>
                 <a:ea typeface="微軟正黑體"/>
@@ -4490,7 +4490,7 @@
             <a:avLst/>
           </a:prstGeom>
           <a:solidFill>
-            <a:srgbClr val="9D5C47"/>
+            <a:srgbClr val="915542"/>
           </a:solidFill>
           <a:ln>
             <a:noFill/>
@@ -4982,7 +4982,7 @@
             <a:r>
               <a:rPr lang="en-US" sz="2000" b="1" i="0" dirty="0">
                 <a:solidFill>
-                  <a:srgbClr val="9D5C47"/>
+                  <a:srgbClr val="915542"/>
                 </a:solidFill>
                 <a:latin typeface="Arial"/>
                 <a:ea typeface="微軟正黑體"/>
@@ -5200,7 +5200,7 @@
             <a:r>
               <a:rPr lang="en-US" sz="2400" b="1" i="0" dirty="0">
                 <a:solidFill>
-                  <a:srgbClr val="9D5C47"/>
+                  <a:srgbClr val="915542"/>
                 </a:solidFill>
                 <a:latin typeface="Arial"/>
                 <a:ea typeface="微軟正黑體"/>
@@ -5310,7 +5310,7 @@
             <a:r>
               <a:rPr lang="en-US" sz="2400" b="1" i="0" dirty="0">
                 <a:solidFill>
-                  <a:srgbClr val="9D5C47"/>
+                  <a:srgbClr val="915542"/>
                 </a:solidFill>
                 <a:latin typeface="Arial"/>
                 <a:ea typeface="微軟正黑體"/>
@@ -5420,7 +5420,7 @@
             <a:r>
               <a:rPr lang="en-US" sz="2400" b="1" i="0" dirty="0">
                 <a:solidFill>
-                  <a:srgbClr val="9D5C47"/>
+                  <a:srgbClr val="915542"/>
                 </a:solidFill>
                 <a:latin typeface="Arial"/>
                 <a:ea typeface="微軟正黑體"/>
@@ -5726,7 +5726,7 @@
             <a:r>
               <a:rPr lang="en-US" sz="2000" b="1" i="0" dirty="0">
                 <a:solidFill>
-                  <a:srgbClr val="9D5C47"/>
+                  <a:srgbClr val="915542"/>
                 </a:solidFill>
                 <a:latin typeface="Arial"/>
                 <a:ea typeface="微軟正黑體"/>
@@ -5989,7 +5989,7 @@
             <a:r>
               <a:rPr lang="en-US" sz="2000" b="1" i="0" dirty="0">
                 <a:solidFill>
-                  <a:srgbClr val="9D5C47"/>
+                  <a:srgbClr val="915542"/>
                 </a:solidFill>
                 <a:latin typeface="Arial"/>
                 <a:ea typeface="微軟正黑體"/>
@@ -6309,7 +6309,7 @@
             </a:avLst>
           </a:prstGeom>
           <a:solidFill>
-            <a:srgbClr val="F5F3F1"/>
+            <a:srgbClr val="FBF9F6"/>
           </a:solidFill>
           <a:ln>
             <a:noFill/>
@@ -6489,7 +6489,7 @@
             <a:r>
               <a:rPr lang="en-US" sz="2000" b="1" i="0" dirty="0">
                 <a:solidFill>
-                  <a:srgbClr val="9D5C47"/>
+                  <a:srgbClr val="915542"/>
                 </a:solidFill>
                 <a:latin typeface="Arial"/>
                 <a:ea typeface="微軟正黑體"/>
@@ -6680,7 +6680,7 @@
               <a:buNone/>
               <a:defRPr sz="9600" b="1">
                 <a:solidFill>
-                  <a:srgbClr val="9D5C47"/>
+                  <a:srgbClr val="915542"/>
                 </a:solidFill>
                 <a:latin typeface="Arial"/>
                 <a:ea typeface="微軟正黑體"/>
@@ -6869,7 +6869,7 @@
             <a:r>
               <a:rPr lang="en-US" sz="2000" b="1" i="0" dirty="0">
                 <a:solidFill>
-                  <a:srgbClr val="9D5C47"/>
+                  <a:srgbClr val="915542"/>
                 </a:solidFill>
                 <a:latin typeface="Arial"/>
                 <a:ea typeface="微軟正黑體"/>
@@ -7091,7 +7091,7 @@
               <a:buNone/>
               <a:defRPr sz="5400" b="1">
                 <a:solidFill>
-                  <a:srgbClr val="9D5C47"/>
+                  <a:srgbClr val="915542"/>
                 </a:solidFill>
                 <a:latin typeface="Arial"/>
                 <a:ea typeface="微軟正黑體"/>
@@ -7254,7 +7254,7 @@
               <a:buNone/>
               <a:defRPr sz="5400" b="1">
                 <a:solidFill>
-                  <a:srgbClr val="9D5C47"/>
+                  <a:srgbClr val="915542"/>
                 </a:solidFill>
                 <a:latin typeface="Arial"/>
                 <a:ea typeface="微軟正黑體"/>
@@ -7417,7 +7417,7 @@
               <a:buNone/>
               <a:defRPr sz="5400" b="1">
                 <a:solidFill>
-                  <a:srgbClr val="9D5C47"/>
+                  <a:srgbClr val="915542"/>
                 </a:solidFill>
                 <a:latin typeface="Arial"/>
                 <a:ea typeface="微軟正黑體"/>
@@ -7580,7 +7580,7 @@
               <a:buNone/>
               <a:defRPr sz="5400" b="1">
                 <a:solidFill>
-                  <a:srgbClr val="9D5C47"/>
+                  <a:srgbClr val="915542"/>
                 </a:solidFill>
                 <a:latin typeface="Arial"/>
                 <a:ea typeface="微軟正黑體"/>
@@ -7701,7 +7701,7 @@
             </a:avLst>
           </a:prstGeom>
           <a:solidFill>
-            <a:srgbClr val="F5F3F1"/>
+            <a:srgbClr val="FBF9F6"/>
           </a:solidFill>
           <a:ln>
             <a:noFill/>
@@ -7816,7 +7816,7 @@
             <a:r>
               <a:rPr lang="en-US" sz="2000" b="1" i="0" dirty="0">
                 <a:solidFill>
-                  <a:srgbClr val="9D5C47"/>
+                  <a:srgbClr val="915542"/>
                 </a:solidFill>
                 <a:latin typeface="Arial"/>
                 <a:ea typeface="微軟正黑體"/>
@@ -8040,7 +8040,7 @@
             </a:avLst>
           </a:prstGeom>
           <a:solidFill>
-            <a:srgbClr val="F5F3F1"/>
+            <a:srgbClr val="FBF9F6"/>
           </a:solidFill>
           <a:ln>
             <a:noFill/>
@@ -8190,7 +8190,7 @@
             <a:r>
               <a:rPr lang="en-US" sz="2000" b="1" i="0" dirty="0">
                 <a:solidFill>
-                  <a:srgbClr val="9D5C47"/>
+                  <a:srgbClr val="915542"/>
                 </a:solidFill>
                 <a:latin typeface="Arial"/>
                 <a:ea typeface="微軟正黑體"/>
@@ -8452,7 +8452,7 @@
             <a:r>
               <a:rPr lang="en-US" sz="1800" b="1" i="0" dirty="0">
                 <a:solidFill>
-                  <a:srgbClr val="9D5C47"/>
+                  <a:srgbClr val="915542"/>
                 </a:solidFill>
                 <a:latin typeface="Arial"/>
                 <a:ea typeface="微軟正黑體"/>
@@ -9078,7 +9078,7 @@
         <a:srgbClr val="5C9C8E"/>
       </a:accent6>
       <a:hlink>
-        <a:srgbClr val="9D5C47"/>
+        <a:srgbClr val="915542"/>
       </a:hlink>
       <a:folHlink>
         <a:srgbClr val="5C5650"/>
